--- a/decks/geog-rivers/geog-rivers_ch2_drainage-basin.pptx
+++ b/decks/geog-rivers/geog-rivers_ch2_drainage-basin.pptx
@@ -126,30 +126,30 @@
   <p:extLst>
     <p:ext uri="{521415D9-36F7-43E2-AB2F-B90AF26B5E84}">
       <p14:sectionLst xmlns:p14="http://schemas.microsoft.com/office/powerpoint/2010/main">
-        <p14:section name="Opening" id="{d63ad1a2-e0c7-eeae-5f96-8fbd9a4ee30e}">
+        <p14:section name="Opening" id="{ec7f03c0-8eb9-704c-cfa4-10ca056aebd9}">
           <p14:sldIdLst>
             <p14:sldId id="256"/>
           </p14:sldIdLst>
         </p14:section>
-        <p14:section name="Gate" id="{efe3d85b-3a21-9070-7930-ddf65384f47f}">
+        <p14:section name="Gate" id="{ca312214-362f-a166-a8c5-42b8cbb54882}">
           <p14:sldIdLst>
             <p14:sldId id="257"/>
             <p14:sldId id="258"/>
           </p14:sldIdLst>
         </p14:section>
-        <p14:section name="Pre-teach" id="{4fc88114-b4a2-87be-e6ff-fc3d513f8859}">
+        <p14:section name="Pre-teach" id="{b57e8db8-e0a7-8676-813b-71c5b9b5a410}">
           <p14:sldIdLst>
             <p14:sldId id="259"/>
             <p14:sldId id="260"/>
           </p14:sldIdLst>
         </p14:section>
-        <p14:section name="Read-along" id="{d8c09750-c79a-de40-1528-df68d4a341b0}">
+        <p14:section name="Read-along" id="{4d74920c-5dd6-06f7-7fe1-b980f0787412}">
           <p14:sldIdLst>
             <p14:sldId id="261"/>
             <p14:sldId id="262"/>
           </p14:sldIdLst>
         </p14:section>
-        <p14:section name="Teach" id="{bd5df30c-f43c-1d40-d18b-93c28d1006d0}">
+        <p14:section name="Teach" id="{9ea0a648-550f-2603-c2f3-10dca0a81bf1}">
           <p14:sldIdLst>
             <p14:sldId id="263"/>
             <p14:sldId id="264"/>
@@ -158,7 +158,7 @@
             <p14:sldId id="267"/>
           </p14:sldIdLst>
         </p14:section>
-        <p14:section name="Routes" id="{5944e0d9-3758-24bd-be2f-2cc8c8f4173a}">
+        <p14:section name="Routes" id="{1a79c48b-1b83-c2e9-e9ec-01027a4ab30e}">
           <p14:sldIdLst>
             <p14:sldId id="268"/>
             <p14:sldId id="269"/>
@@ -166,12 +166,12 @@
             <p14:sldId id="271"/>
           </p14:sldIdLst>
         </p14:section>
-        <p14:section name="Close" id="{188177ba-ffd7-ce32-6204-3591d0eed952}">
+        <p14:section name="Close" id="{6b1386d0-714c-ac44-e8da-c099b1ad363c}">
           <p14:sldIdLst>
             <p14:sldId id="272"/>
           </p14:sldIdLst>
         </p14:section>
-        <p14:section name="Answers" id="{c0d14229-d949-a92b-a00b-5793f8e2da08}">
+        <p14:section name="Answers" id="{c9f3e4ba-6ce8-d8a7-6606-63abdc1c529c}">
           <p14:sldIdLst>
             <p14:sldId id="273"/>
             <p14:sldId id="274"/>
@@ -1601,7 +1601,7 @@
               <a:rPr lang="en-US" dirty="0"/>
               <a:t>Do now — retrieval. Silent, no notes, no help: recall comes before any support. Give about four minutes.
 1. The point where two rivers meet and join is called a ___.  →  confluence
-2. Where does a river start?  →  A   At its source, usually in high land
+2. Where does a river start?  →  D   At its source, usually in high land
 3. The Nile is listed as 6695 km long and the Amazon as 6516 km. How many kilometres longer is the Nile?  →  179 km
 Circulate: who gets 3/3 (Stretch route), 2/3 (Core), 0–1 (Support)? Use this to route pupils later in the lesson.</a:t>
             </a:r>
@@ -1784,7 +1784,7 @@
               <a:rPr lang="en-US" dirty="0"/>
               <a:t>Answers — pupils mark their own in a different colour, then hands up for 3/3, 2/3, 1/3.
 1. confluence. A confluence is the meeting point; the smaller river that joins is the tributary.
-2. A   At its source, usually in high land. The source is the start of a river, usually in hills or mountains where rain is heaviest.
+2. D   At its source, usually in high land. The source is the start of a river, usually in hills or mountains where rain is heaviest.
 3. 179 km. 6695 − 6516 = 179 km.
 Say the route each score points to: 3/3 Stretch, 2/3 Core, 0–1 Support. Pupils may choose to move up.</a:t>
             </a:r>
@@ -12040,7 +12040,7 @@
                 <a:ea typeface="Calibri" pitchFamily="34" charset="-122"/>
                 <a:cs typeface="Calibri" pitchFamily="34" charset="-120"/>
               </a:rPr>
-              <a:t>At its source, usually in high land</a:t>
+              <a:t>At a confluence</a:t>
             </a:r>
             <a:endParaRPr lang="en-US" sz="2400" dirty="0"/>
           </a:p>
@@ -12114,7 +12114,7 @@
                 <a:ea typeface="Calibri" pitchFamily="34" charset="-122"/>
                 <a:cs typeface="Calibri" pitchFamily="34" charset="-120"/>
               </a:rPr>
-              <a:t>At a confluence</a:t>
+              <a:t>On the floodplain</a:t>
             </a:r>
             <a:endParaRPr lang="en-US" sz="2400" dirty="0"/>
           </a:p>
@@ -12151,7 +12151,7 @@
                 <a:ea typeface="Calibri" pitchFamily="34" charset="-122"/>
                 <a:cs typeface="Calibri" pitchFamily="34" charset="-120"/>
               </a:rPr>
-              <a:t>On the floodplain</a:t>
+              <a:t>At its source, usually in high land</a:t>
             </a:r>
             <a:endParaRPr lang="en-US" sz="2400" dirty="0"/>
           </a:p>
@@ -13459,7 +13459,7 @@
                 <a:ea typeface="Calibri" pitchFamily="34" charset="-122"/>
                 <a:cs typeface="Calibri" pitchFamily="34" charset="-120"/>
               </a:rPr>
-              <a:t>A   At its source, usually in high land</a:t>
+              <a:t>D   At its source, usually in high land</a:t>
             </a:r>
             <a:endParaRPr lang="en-US" sz="2200" dirty="0"/>
           </a:p>

--- a/decks/geog-rivers/geog-rivers_ch2_drainage-basin.pptx
+++ b/decks/geog-rivers/geog-rivers_ch2_drainage-basin.pptx
@@ -126,30 +126,30 @@
   <p:extLst>
     <p:ext uri="{521415D9-36F7-43E2-AB2F-B90AF26B5E84}">
       <p14:sectionLst xmlns:p14="http://schemas.microsoft.com/office/powerpoint/2010/main">
-        <p14:section name="Opening" id="{ec7f03c0-8eb9-704c-cfa4-10ca056aebd9}">
+        <p14:section name="Opening" id="{a3bcb570-bacc-cd2a-e82a-7c0c0d1527d4}">
           <p14:sldIdLst>
             <p14:sldId id="256"/>
           </p14:sldIdLst>
         </p14:section>
-        <p14:section name="Gate" id="{ca312214-362f-a166-a8c5-42b8cbb54882}">
+        <p14:section name="Gate" id="{7143f9ce-939f-b036-c071-2d46e2539ca5}">
           <p14:sldIdLst>
             <p14:sldId id="257"/>
             <p14:sldId id="258"/>
           </p14:sldIdLst>
         </p14:section>
-        <p14:section name="Pre-teach" id="{b57e8db8-e0a7-8676-813b-71c5b9b5a410}">
+        <p14:section name="Pre-teach" id="{1221d984-b840-0b53-cb9a-1b305e0477bd}">
           <p14:sldIdLst>
             <p14:sldId id="259"/>
             <p14:sldId id="260"/>
           </p14:sldIdLst>
         </p14:section>
-        <p14:section name="Read-along" id="{4d74920c-5dd6-06f7-7fe1-b980f0787412}">
+        <p14:section name="Read-along" id="{f6daf3d7-4870-089b-7c72-b575ce3d7ac2}">
           <p14:sldIdLst>
             <p14:sldId id="261"/>
             <p14:sldId id="262"/>
           </p14:sldIdLst>
         </p14:section>
-        <p14:section name="Teach" id="{9ea0a648-550f-2603-c2f3-10dca0a81bf1}">
+        <p14:section name="Teach" id="{7ed4d845-932c-abbf-1c60-e21b3e9db845}">
           <p14:sldIdLst>
             <p14:sldId id="263"/>
             <p14:sldId id="264"/>
@@ -158,7 +158,7 @@
             <p14:sldId id="267"/>
           </p14:sldIdLst>
         </p14:section>
-        <p14:section name="Routes" id="{1a79c48b-1b83-c2e9-e9ec-01027a4ab30e}">
+        <p14:section name="Routes" id="{453d8536-c182-b2fc-ec1c-d4680ce6e7f0}">
           <p14:sldIdLst>
             <p14:sldId id="268"/>
             <p14:sldId id="269"/>
@@ -166,12 +166,12 @@
             <p14:sldId id="271"/>
           </p14:sldIdLst>
         </p14:section>
-        <p14:section name="Close" id="{6b1386d0-714c-ac44-e8da-c099b1ad363c}">
+        <p14:section name="Close" id="{ae1bc725-0a0e-c54a-4e61-8cde91d994f5}">
           <p14:sldIdLst>
             <p14:sldId id="272"/>
           </p14:sldIdLst>
         </p14:section>
-        <p14:section name="Answers" id="{c9f3e4ba-6ce8-d8a7-6606-63abdc1c529c}">
+        <p14:section name="Answers" id="{031f6eeb-8f83-f769-9af2-a53937477069}">
           <p14:sldIdLst>
             <p14:sldId id="273"/>
             <p14:sldId id="274"/>
